--- a/presentacion/Cursor_Presentacion.pptx
+++ b/presentacion/Cursor_Presentacion.pptx
@@ -7688,7 +7688,7 @@
                 </a:solidFill>
                 <a:latin typeface="Segoe UI"/>
               </a:rPr>
-              <a:t>Nueva sesión / /clear entre tareas no relacionadas</a:t>
+              <a:t>Nueva sesión / chat limpio entre tareas no relacionadas</a:t>
             </a:r>
           </a:p>
         </p:txBody>
@@ -9179,7 +9179,7 @@
                 </a:solidFill>
                 <a:latin typeface="Segoe UI"/>
               </a:rPr>
-              <a:t>permissions.json: allowlist server:tool, con glob.</a:t>
+              <a:t>permissions.json: mcpAllowlist / terminalAllowlist.</a:t>
             </a:r>
           </a:p>
         </p:txBody>
@@ -10117,7 +10117,7 @@
                 </a:solidFill>
                 <a:latin typeface="Segoe UI"/>
               </a:rPr>
-              <a:t>Lo que el agente puede hacer: Read/Edit/Shell/Grep + Task + mcp__*. Gobernadas por permissions.json.</a:t>
+              <a:t>Lo que el agente puede hacer: Read/Edit/Shell/Grep + Task + mcp__*. Gobernadas por permissions.json (mcpAllowlist).</a:t>
             </a:r>
           </a:p>
         </p:txBody>
@@ -11612,7 +11612,7 @@
                 </a:solidFill>
                 <a:latin typeface="Segoe UI"/>
               </a:rPr>
-              <a:t>"Subagente custom" = plantilla de prompt + skill</a:t>
+              <a:t>Custom = .cursor/agents/&lt;nombre&gt;.md</a:t>
             </a:r>
           </a:p>
         </p:txBody>
@@ -11703,7 +11703,7 @@
                 </a:solidFill>
                 <a:latin typeface="Consolas"/>
               </a:rPr>
-              <a:t># Plantilla de prompt (no hay .claude/agents/*.md</a:t>
+              <a:t># .cursor/agents/refactor-scout.md</a:t>
             </a:r>
           </a:p>
           <a:p>
@@ -11721,11 +11721,11 @@
             <a:r>
               <a:rPr sz="1150" b="0">
                 <a:solidFill>
-                  <a:srgbClr val="9AA4B2"/>
+                  <a:srgbClr val="E8EAED"/>
                 </a:solidFill>
                 <a:latin typeface="Consolas"/>
               </a:rPr>
-              <a:t># equivalente): pégala al lanzar el subagent</a:t>
+              <a:t>---</a:t>
             </a:r>
           </a:p>
           <a:p>
@@ -11747,7 +11747,7 @@
                 </a:solidFill>
                 <a:latin typeface="Consolas"/>
               </a:rPr>
-              <a:t>"Actúa como refactor-scout: usa CodeGraph</a:t>
+              <a:t>name: refactor-scout</a:t>
             </a:r>
           </a:p>
           <a:p>
@@ -11769,7 +11769,7 @@
                 </a:solidFill>
                 <a:latin typeface="Consolas"/>
               </a:rPr>
-              <a:t> codegraph_explore y LUEGO Serena</a:t>
+              <a:t>description: Scout blast radius before rename</a:t>
             </a:r>
           </a:p>
           <a:p>
@@ -11791,7 +11791,7 @@
                 </a:solidFill>
                 <a:latin typeface="Consolas"/>
               </a:rPr>
-              <a:t> find_referencing_symbols antes de proponer</a:t>
+              <a:t>readonly: true</a:t>
             </a:r>
           </a:p>
           <a:p>
@@ -11813,7 +11813,29 @@
                 </a:solidFill>
                 <a:latin typeface="Consolas"/>
               </a:rPr>
-              <a:t> el rename."</a:t>
+              <a:t>---</a:t>
+            </a:r>
+          </a:p>
+          <a:p>
+            <a:pPr algn="l">
+              <a:lnSpc>
+                <a:spcPct val="112000"/>
+              </a:lnSpc>
+              <a:spcBef>
+                <a:spcPts val="0"/>
+              </a:spcBef>
+              <a:spcAft>
+                <a:spcPts val="200"/>
+              </a:spcAft>
+            </a:pPr>
+            <a:r>
+              <a:rPr sz="1150" b="0">
+                <a:solidFill>
+                  <a:srgbClr val="E8EAED"/>
+                </a:solidFill>
+                <a:latin typeface="Consolas"/>
+              </a:rPr>
+              <a:t>Usa CodeGraph y LUEGO Serena…</a:t>
             </a:r>
           </a:p>
         </p:txBody>
@@ -12133,7 +12155,7 @@
                 </a:solidFill>
                 <a:latin typeface="Segoe UI"/>
               </a:rPr>
-              <a:t>Ejemplos portados en ejemplos/subagents/prompts/: security-reviewer y refactor-scout.</a:t>
+              <a:t>Ejemplo listo: ejemplos/subagents/.cursor/agents/refactor-scout.md (también prompts/ si prefieres pegar al lanzar).</a:t>
             </a:r>
             <a:r>
               <a:rPr sz="1300" b="1">
@@ -14553,7 +14575,7 @@
                 </a:solidFill>
                 <a:latin typeface="Segoe UI"/>
               </a:rPr>
-              <a:t>Prompt/skill al lanzar</a:t>
+              <a:t>.cursor/agents/*.md, prompt o skill</a:t>
             </a:r>
           </a:p>
         </p:txBody>
@@ -14652,7 +14674,7 @@
                 </a:solidFill>
                 <a:latin typeface="Segoe UI"/>
               </a:rPr>
-              <a:t>GSD (Claude Code) empaqueta roles como subagentes plugin; en Cursor esos roles viven como skills/prompts — este proyecto usa el flujo data/changes/, no GSD (ver Parte 2).</a:t>
+              <a:t>GSD (Claude Code) empaqueta roles como subagentes plugin; en Cursor esos roles viven como .cursor/agents/ + skills — este proyecto usa data/changes/, no GSD (ver Parte 2).</a:t>
             </a:r>
           </a:p>
         </p:txBody>
@@ -16680,7 +16702,7 @@
                 </a:solidFill>
                 <a:latin typeface="Segoe UI"/>
               </a:rPr>
-              <a:t>agent -p en cualquier tubería Unix, git hook o script.</a:t>
+              <a:t>agent -p en scripts y CI (print mode; --force / --output-format).</a:t>
             </a:r>
           </a:p>
         </p:txBody>
@@ -32595,7 +32617,7 @@
                 </a:solidFill>
                 <a:latin typeface="Segoe UI"/>
               </a:rPr>
-              <a:t>Subagents/Agent Teams → Cursor Subagents (sin Teams)</a:t>
+              <a:t>Subagents/Agent Teams → .cursor/agents/*.md (sin Teams)</a:t>
             </a:r>
           </a:p>
           <a:p>
@@ -32626,7 +32648,7 @@
                 </a:solidFill>
                 <a:latin typeface="Segoe UI"/>
               </a:rPr>
-              <a:t>claude -p (headless) → agent -p (Cursor CLI)</a:t>
+              <a:t>claude -p (headless) → agent -p (Cursor CLI print mode)</a:t>
             </a:r>
           </a:p>
         </p:txBody>
@@ -43090,7 +43112,7 @@
                 </a:solidFill>
                 <a:latin typeface="Segoe UI"/>
               </a:rPr>
-              <a:t>curl https://cursor.com/install -fsS | bash — headless-capable.</a:t>
+              <a:t>curl … | bash (Unix) · irm … | iex (Windows) — headless-capable.</a:t>
             </a:r>
           </a:p>
         </p:txBody>
@@ -44686,7 +44708,7 @@
                 </a:solidFill>
                 <a:latin typeface="Segoe UI"/>
               </a:rPr>
-              <a:t>Headless (agent -p) — componible</a:t>
+              <a:t>Headless (agent -p) — scripts y CI</a:t>
             </a:r>
           </a:p>
         </p:txBody>
@@ -44740,7 +44762,7 @@
                 </a:solidFill>
                 <a:latin typeface="Segoe UI"/>
               </a:rPr>
-              <a:t>Cursor CLI en modo headless: prompt in, resultado out</a:t>
+              <a:t>Print mode: prompt in (arg), resultado por stdout</a:t>
             </a:r>
           </a:p>
           <a:p>
@@ -44771,7 +44793,7 @@
                 </a:solidFill>
                 <a:latin typeface="Segoe UI"/>
               </a:rPr>
-              <a:t>Encaja en tuberías Unix, git hooks y CI</a:t>
+              <a:t>Combina con --force / --output-format text|json</a:t>
             </a:r>
           </a:p>
           <a:p>
@@ -44938,7 +44960,7 @@
                 </a:solidFill>
                 <a:latin typeface="Consolas"/>
               </a:rPr>
-              <a:t>tail -200 app.log | agent -p "avísame si ves anomalías"</a:t>
+              <a:t>agent -p "resume los cambios de esta rama"</a:t>
             </a:r>
           </a:p>
           <a:p>
@@ -44960,7 +44982,7 @@
                 </a:solidFill>
                 <a:latin typeface="Consolas"/>
               </a:rPr>
-              <a:t>git diff main --name-only | agent -p "revisa estos ficheros por seguridad"</a:t>
+              <a:t>agent -p --output-format text "revisa por seguridad los ficheros tocados vs main"</a:t>
             </a:r>
           </a:p>
         </p:txBody>
@@ -46473,7 +46495,7 @@
                 </a:solidFill>
                 <a:latin typeface="Consolas"/>
               </a:rPr>
-              <a:t>~/.cursor/permissions.json    # allowlist server:tool</a:t>
+              <a:t>~/.cursor/permissions.json    # mcpAllowlist server:tool</a:t>
             </a:r>
           </a:p>
         </p:txBody>
@@ -46618,7 +46640,7 @@
                 </a:solidFill>
                 <a:latin typeface="Segoe UI"/>
               </a:rPr>
-              <a:t>permissions.json: proyecto + usuario, con glob (server:*, *:tool)</a:t>
+              <a:t>permissions.json: mcpAllowlist / terminalAllowlist (glob)</a:t>
             </a:r>
           </a:p>
           <a:p>
@@ -49641,7 +49663,7 @@
                 </a:solidFill>
                 <a:latin typeface="Consolas"/>
               </a:rPr>
-              <a:t>agent&gt; /clear      # nueva sesión</a:t>
+              <a:t>agent&gt; /summarize  # liberar contexto</a:t>
             </a:r>
           </a:p>
           <a:p>
@@ -49663,7 +49685,7 @@
                 </a:solidFill>
                 <a:latin typeface="Consolas"/>
               </a:rPr>
-              <a:t>agent&gt; /rewind     # volver a un mensaje previo</a:t>
+              <a:t>agent&gt; /rewind     # mensaje previo</a:t>
             </a:r>
           </a:p>
           <a:p>
@@ -49681,11 +49703,11 @@
             <a:r>
               <a:rPr sz="1150" b="0">
                 <a:solidFill>
-                  <a:srgbClr val="E8EAED"/>
+                  <a:srgbClr val="9AA4B2"/>
                 </a:solidFill>
                 <a:latin typeface="Consolas"/>
               </a:rPr>
-              <a:t>agent&gt; /summarize  # resumir y liberar contexto</a:t>
+              <a:t># nueva chat / nueva invocación de agent</a:t>
             </a:r>
           </a:p>
           <a:p>
@@ -49707,7 +49729,7 @@
                 </a:solidFill>
                 <a:latin typeface="Consolas"/>
               </a:rPr>
-              <a:t># + anillo de contexto en el editor (uso por bloque)</a:t>
+              <a:t># + anillo de contexto en el editor</a:t>
             </a:r>
           </a:p>
         </p:txBody>

--- a/presentacion/Cursor_Presentacion.pptx
+++ b/presentacion/Cursor_Presentacion.pptx
@@ -9359,7 +9359,7 @@
                 </a:solidFill>
                 <a:latin typeface="Segoe UI"/>
               </a:rPr>
-              <a:t>Servers que uso</a:t>
+              <a:t>Servers del día a día</a:t>
             </a:r>
           </a:p>
         </p:txBody>
@@ -9404,7 +9404,7 @@
                 </a:solidFill>
                 <a:latin typeface="Segoe UI"/>
               </a:rPr>
-              <a:t>serena · context7 · playwright · codegraph · supabase.</a:t>
+              <a:t>serena · context7 · playwright · codegraph (+ supabase opcional).</a:t>
             </a:r>
           </a:p>
         </p:txBody>
@@ -11420,7 +11420,7 @@
                 </a:solidFill>
                 <a:latin typeface="Segoe UI"/>
               </a:rPr>
-              <a:t>Feature nativa de Cursor (2.4+)</a:t>
+              <a:t>Feature nativa de Cursor</a:t>
             </a:r>
           </a:p>
         </p:txBody>
@@ -14620,7 +14620,7 @@
                 </a:solidFill>
                 <a:latin typeface="Segoe UI"/>
               </a:rPr>
-              <a:t>cursor.com/agents o CLI --background</a:t>
+              <a:t>cursor.com/agents (UI / handoff &amp;)</a:t>
             </a:r>
           </a:p>
         </p:txBody>
@@ -15426,7 +15426,7 @@
                 </a:solidFill>
                 <a:latin typeface="Segoe UI"/>
               </a:rPr>
-              <a:t>permission: allow/deny/ask · exit 2 = deny también</a:t>
+              <a:t>permission: prefer deny para gates (ask a menudo se ignora)</a:t>
             </a:r>
           </a:p>
           <a:p>
@@ -15457,7 +15457,7 @@
                 </a:solidFill>
                 <a:latin typeface="Segoe UI"/>
               </a:rPr>
-              <a:t>failClosed: si el hook crashea, bloquea (no fail-open)</a:t>
+              <a:t>exit 2 = deny también · failClosed si el hook crashea</a:t>
             </a:r>
           </a:p>
         </p:txBody>
@@ -17197,7 +17197,7 @@
                 </a:solidFill>
                 <a:latin typeface="Segoe UI"/>
               </a:rPr>
-              <a:t>Cursor SDK (@cursor/sdk) — cloud: { repos, autoCreatePR } para PRs automáticos</a:t>
+              <a:t>Cursor SDK (@cursor/sdk) — Agent.prompt (one-shot) · Agent.create+send (stream/multi-turn)</a:t>
             </a:r>
           </a:p>
         </p:txBody>
@@ -17310,7 +17310,7 @@
                 </a:solidFill>
                 <a:latin typeface="Consolas"/>
               </a:rPr>
-              <a:t>const agent = await Agent.create({ apiKey: process.env.CURSOR_API_KEY, local: { cwd } });</a:t>
+              <a:t>const result = await Agent.prompt(prompt, {</a:t>
             </a:r>
           </a:p>
           <a:p>
@@ -17332,7 +17332,7 @@
                 </a:solidFill>
                 <a:latin typeface="Consolas"/>
               </a:rPr>
-              <a:t>const run = await agent.send(prompt);</a:t>
+              <a:t>  apiKey: process.env.CURSOR_API_KEY!, local: { cwd } });</a:t>
             </a:r>
           </a:p>
           <a:p>
@@ -17354,7 +17354,7 @@
                 </a:solidFill>
                 <a:latin typeface="Consolas"/>
               </a:rPr>
-              <a:t>for await (const ev of run.stream()) { /* … */ }</a:t>
+              <a:t>// multi-turn: Agent.create(...) → agent.send(...) → run.stream()</a:t>
             </a:r>
           </a:p>
         </p:txBody>

--- a/presentacion/Cursor_Presentacion.pptx
+++ b/presentacion/Cursor_Presentacion.pptx
@@ -34794,7 +34794,7 @@
                 </a:solidFill>
                 <a:latin typeface="Segoe UI"/>
               </a:rPr>
-              <a:t>Docs = fuente de verdad; grafo derivado (un publisher)</a:t>
+              <a:t>UN solo publisher. "Derivado" es del fichero, no de la carpeta</a:t>
             </a:r>
           </a:p>
         </p:txBody>
@@ -39883,7 +39883,7 @@
                 </a:solidFill>
                 <a:latin typeface="Segoe UI"/>
               </a:rPr>
-              <a:t>Recall en zonas densas · EXTRACTED = fiable, INFERRED = pista · interno (data/) · derivado: nunca viaja, se reconstruye</a:t>
+              <a:t>Recall en zonas densas · EXTRACTED = fiable, INFERRED = pista · interno (data/) · derivado se reconstruye, pero lo escrito a mano viaja</a:t>
             </a:r>
           </a:p>
         </p:txBody>
